--- a/youtube-slides/からだの不思議12_飲酒と記憶/飲酒と記憶_スライド.pptx
+++ b/youtube-slides/からだの不思議12_飲酒と記憶/飲酒と記憶_スライド.pptx
@@ -3916,7 +3916,7 @@
         <p:spPr>
           <a:xfrm>
             <a:off x="274320" y="1005840"/>
-            <a:ext cx="1828800" cy="502920"/>
+            <a:ext cx="1645920" cy="457200"/>
           </a:xfrm>
           <a:prstGeom prst="rect">
             <a:avLst/>
@@ -3935,8 +3935,8 @@
         </p:nvSpPr>
         <p:spPr>
           <a:xfrm>
-            <a:off x="2103120" y="1005840"/>
-            <a:ext cx="3291840" cy="502920"/>
+            <a:off x="1920240" y="1005840"/>
+            <a:ext cx="3383280" cy="457200"/>
           </a:xfrm>
           <a:prstGeom prst="rect">
             <a:avLst/>
@@ -3955,8 +3955,8 @@
         </p:nvSpPr>
         <p:spPr>
           <a:xfrm>
-            <a:off x="5394960" y="1005840"/>
-            <a:ext cx="3474720" cy="502920"/>
+            <a:off x="5303520" y="1005840"/>
+            <a:ext cx="3566160" cy="457200"/>
           </a:xfrm>
           <a:prstGeom prst="rect">
             <a:avLst/>
@@ -3976,7 +3976,7 @@
         <p:spPr>
           <a:xfrm>
             <a:off x="274320" y="1005840"/>
-            <a:ext cx="1828800" cy="502920"/>
+            <a:ext cx="1645920" cy="457200"/>
           </a:xfrm>
           <a:prstGeom prst="rect">
             <a:avLst/>
@@ -4014,8 +4014,8 @@
         </p:nvSpPr>
         <p:spPr>
           <a:xfrm>
-            <a:off x="2103120" y="1005840"/>
-            <a:ext cx="3291840" cy="502920"/>
+            <a:off x="1920240" y="1005840"/>
+            <a:ext cx="3383280" cy="457200"/>
           </a:xfrm>
           <a:prstGeom prst="rect">
             <a:avLst/>
@@ -4053,8 +4053,8 @@
         </p:nvSpPr>
         <p:spPr>
           <a:xfrm>
-            <a:off x="5394960" y="1005840"/>
-            <a:ext cx="3474720" cy="502920"/>
+            <a:off x="5303520" y="1005840"/>
+            <a:ext cx="3566160" cy="457200"/>
           </a:xfrm>
           <a:prstGeom prst="rect">
             <a:avLst/>
@@ -4092,8 +4092,8 @@
         </p:nvSpPr>
         <p:spPr>
           <a:xfrm>
-            <a:off x="274320" y="1508760"/>
-            <a:ext cx="8595360" cy="685800"/>
+            <a:off x="274320" y="1463040"/>
+            <a:ext cx="8595360" cy="585216"/>
           </a:xfrm>
           <a:prstGeom prst="rect">
             <a:avLst/>
@@ -4112,8 +4112,8 @@
         </p:nvSpPr>
         <p:spPr>
           <a:xfrm>
-            <a:off x="274320" y="1508760"/>
-            <a:ext cx="1828800" cy="685800"/>
+            <a:off x="274320" y="1463040"/>
+            <a:ext cx="1645920" cy="585216"/>
           </a:xfrm>
           <a:prstGeom prst="rect">
             <a:avLst/>
@@ -4126,10 +4126,13 @@
           <a:lstStyle/>
           <a:p>
             <a:pPr algn="ctr" indent="0" marL="0">
-              <a:buNone/>
-            </a:pPr>
-            <a:r>
-              <a:rPr lang="en-US" sz="1200" b="1" dirty="0">
+              <a:lnSpc>
+                <a:spcPct val="115000"/>
+              </a:lnSpc>
+              <a:buNone/>
+            </a:pPr>
+            <a:r>
+              <a:rPr lang="en-US" sz="1100" b="1" dirty="0">
                 <a:solidFill>
                   <a:srgbClr val="2C5AA0"/>
                 </a:solidFill>
@@ -4139,7 +4142,7 @@
               </a:rPr>
               <a:t>別名</a:t>
             </a:r>
-            <a:endParaRPr lang="en-US" sz="1200" dirty="0"/>
+            <a:endParaRPr lang="en-US" sz="1100" dirty="0"/>
           </a:p>
         </p:txBody>
       </p:sp>
@@ -4151,8 +4154,8 @@
         </p:nvSpPr>
         <p:spPr>
           <a:xfrm>
-            <a:off x="2103120" y="1508760"/>
-            <a:ext cx="3291840" cy="685800"/>
+            <a:off x="1920240" y="1463040"/>
+            <a:ext cx="3383280" cy="585216"/>
           </a:xfrm>
           <a:prstGeom prst="rect">
             <a:avLst/>
@@ -4166,7 +4169,7 @@
           <a:p>
             <a:pPr indent="0" marL="0">
               <a:lnSpc>
-                <a:spcPct val="120000"/>
+                <a:spcPct val="115000"/>
               </a:lnSpc>
               <a:buNone/>
             </a:pPr>
@@ -4193,8 +4196,8 @@
         </p:nvSpPr>
         <p:spPr>
           <a:xfrm>
-            <a:off x="5394960" y="1508760"/>
-            <a:ext cx="3474720" cy="685800"/>
+            <a:off x="5303520" y="1463040"/>
+            <a:ext cx="3566160" cy="585216"/>
           </a:xfrm>
           <a:prstGeom prst="rect">
             <a:avLst/>
@@ -4208,7 +4211,7 @@
           <a:p>
             <a:pPr indent="0" marL="0">
               <a:lnSpc>
-                <a:spcPct val="120000"/>
+                <a:spcPct val="115000"/>
               </a:lnSpc>
               <a:buNone/>
             </a:pPr>
@@ -4235,8 +4238,8 @@
         </p:nvSpPr>
         <p:spPr>
           <a:xfrm>
-            <a:off x="274320" y="2194560"/>
-            <a:ext cx="8595360" cy="685800"/>
+            <a:off x="274320" y="2048256"/>
+            <a:ext cx="8595360" cy="585216"/>
           </a:xfrm>
           <a:prstGeom prst="rect">
             <a:avLst/>
@@ -4255,8 +4258,8 @@
         </p:nvSpPr>
         <p:spPr>
           <a:xfrm>
-            <a:off x="274320" y="2194560"/>
-            <a:ext cx="1828800" cy="685800"/>
+            <a:off x="274320" y="2048256"/>
+            <a:ext cx="1645920" cy="585216"/>
           </a:xfrm>
           <a:prstGeom prst="rect">
             <a:avLst/>
@@ -4269,10 +4272,13 @@
           <a:lstStyle/>
           <a:p>
             <a:pPr algn="ctr" indent="0" marL="0">
-              <a:buNone/>
-            </a:pPr>
-            <a:r>
-              <a:rPr lang="en-US" sz="1200" b="1" dirty="0">
+              <a:lnSpc>
+                <a:spcPct val="115000"/>
+              </a:lnSpc>
+              <a:buNone/>
+            </a:pPr>
+            <a:r>
+              <a:rPr lang="en-US" sz="1100" b="1" dirty="0">
                 <a:solidFill>
                   <a:srgbClr val="2C5AA0"/>
                 </a:solidFill>
@@ -4282,7 +4288,7 @@
               </a:rPr>
               <a:t>記憶の欠落</a:t>
             </a:r>
-            <a:endParaRPr lang="en-US" sz="1200" dirty="0"/>
+            <a:endParaRPr lang="en-US" sz="1100" dirty="0"/>
           </a:p>
         </p:txBody>
       </p:sp>
@@ -4294,8 +4300,8 @@
         </p:nvSpPr>
         <p:spPr>
           <a:xfrm>
-            <a:off x="2103120" y="2194560"/>
-            <a:ext cx="3291840" cy="685800"/>
+            <a:off x="1920240" y="2048256"/>
+            <a:ext cx="3383280" cy="585216"/>
           </a:xfrm>
           <a:prstGeom prst="rect">
             <a:avLst/>
@@ -4309,7 +4315,7 @@
           <a:p>
             <a:pPr indent="0" marL="0">
               <a:lnSpc>
-                <a:spcPct val="120000"/>
+                <a:spcPct val="115000"/>
               </a:lnSpc>
               <a:buNone/>
             </a:pPr>
@@ -4336,8 +4342,8 @@
         </p:nvSpPr>
         <p:spPr>
           <a:xfrm>
-            <a:off x="5394960" y="2194560"/>
-            <a:ext cx="3474720" cy="685800"/>
+            <a:off x="5303520" y="2048256"/>
+            <a:ext cx="3566160" cy="585216"/>
           </a:xfrm>
           <a:prstGeom prst="rect">
             <a:avLst/>
@@ -4351,7 +4357,7 @@
           <a:p>
             <a:pPr indent="0" marL="0">
               <a:lnSpc>
-                <a:spcPct val="120000"/>
+                <a:spcPct val="115000"/>
               </a:lnSpc>
               <a:buNone/>
             </a:pPr>
@@ -4364,27 +4370,131 @@
                 <a:ea typeface="BIZ UDPGothic" pitchFamily="34" charset="-122"/>
                 <a:cs typeface="BIZ UDPGothic" pitchFamily="34" charset="-120"/>
               </a:rPr>
-              <a:t>一定時間の記憶が</a:t>
+              <a:t>一定時間の記憶がまるごと消失</a:t>
             </a:r>
             <a:endParaRPr lang="en-US" sz="1200" dirty="0"/>
           </a:p>
+        </p:txBody>
+      </p:sp>
+      <p:sp>
+        <p:nvSpPr>
+          <p:cNvPr id="18" name="Shape 16"/>
+          <p:cNvSpPr/>
+          <p:nvPr/>
+        </p:nvSpPr>
+        <p:spPr>
+          <a:xfrm>
+            <a:off x="274320" y="2633472"/>
+            <a:ext cx="8595360" cy="585216"/>
+          </a:xfrm>
+          <a:prstGeom prst="rect">
+            <a:avLst/>
+          </a:prstGeom>
+          <a:solidFill>
+            <a:srgbClr val="F5F7FA"/>
+          </a:solidFill>
+          <a:ln/>
+        </p:spPr>
+      </p:sp>
+      <p:sp>
+        <p:nvSpPr>
+          <p:cNvPr id="19" name="Text 17"/>
+          <p:cNvSpPr/>
+          <p:nvPr/>
+        </p:nvSpPr>
+        <p:spPr>
+          <a:xfrm>
+            <a:off x="274320" y="2633472"/>
+            <a:ext cx="1645920" cy="585216"/>
+          </a:xfrm>
+          <a:prstGeom prst="rect">
+            <a:avLst/>
+          </a:prstGeom>
+          <a:noFill/>
+          <a:ln/>
+        </p:spPr>
+        <p:txBody>
+          <a:bodyPr wrap="square" lIns="25400" tIns="25400" rIns="25400" bIns="25400" rtlCol="0" anchor="ctr"/>
+          <a:lstStyle/>
+          <a:p>
+            <a:pPr algn="ctr" indent="0" marL="0">
+              <a:lnSpc>
+                <a:spcPct val="115000"/>
+              </a:lnSpc>
+              <a:buNone/>
+            </a:pPr>
+            <a:r>
+              <a:rPr lang="en-US" sz="1100" b="1" dirty="0">
+                <a:solidFill>
+                  <a:srgbClr val="2C5AA0"/>
+                </a:solidFill>
+                <a:latin typeface="BIZ UDPGothic" pitchFamily="34" charset="0"/>
+                <a:ea typeface="BIZ UDPGothic" pitchFamily="34" charset="-122"/>
+                <a:cs typeface="BIZ UDPGothic" pitchFamily="34" charset="-120"/>
+              </a:rPr>
+              <a:t>ヒントで</a:t>
+            </a:r>
+            <a:endParaRPr lang="en-US" sz="1100" dirty="0"/>
+          </a:p>
+          <a:p>
+            <a:pPr algn="ctr" indent="0" marL="0">
+              <a:lnSpc>
+                <a:spcPct val="115000"/>
+              </a:lnSpc>
+              <a:buNone/>
+            </a:pPr>
+            <a:r>
+              <a:rPr lang="en-US" sz="1100" b="1" dirty="0">
+                <a:solidFill>
+                  <a:srgbClr val="2C5AA0"/>
+                </a:solidFill>
+                <a:latin typeface="BIZ UDPGothic" pitchFamily="34" charset="0"/>
+                <a:ea typeface="BIZ UDPGothic" pitchFamily="34" charset="-122"/>
+                <a:cs typeface="BIZ UDPGothic" pitchFamily="34" charset="-120"/>
+              </a:rPr>
+              <a:t>思い出せるか</a:t>
+            </a:r>
+            <a:endParaRPr lang="en-US" sz="1100" dirty="0"/>
+          </a:p>
+        </p:txBody>
+      </p:sp>
+      <p:sp>
+        <p:nvSpPr>
+          <p:cNvPr id="20" name="Text 18"/>
+          <p:cNvSpPr/>
+          <p:nvPr/>
+        </p:nvSpPr>
+        <p:spPr>
+          <a:xfrm>
+            <a:off x="1920240" y="2633472"/>
+            <a:ext cx="3383280" cy="585216"/>
+          </a:xfrm>
+          <a:prstGeom prst="rect">
+            <a:avLst/>
+          </a:prstGeom>
+          <a:noFill/>
+          <a:ln/>
+        </p:spPr>
+        <p:txBody>
+          <a:bodyPr wrap="square" lIns="0" tIns="101600" rIns="101600" bIns="0" rtlCol="0" anchor="ctr"/>
+          <a:lstStyle/>
           <a:p>
             <a:pPr indent="0" marL="0">
               <a:lnSpc>
-                <a:spcPct val="120000"/>
+                <a:spcPct val="115000"/>
               </a:lnSpc>
               <a:buNone/>
             </a:pPr>
             <a:r>
-              <a:rPr lang="en-US" sz="1200" b="1" dirty="0">
-                <a:solidFill>
-                  <a:srgbClr val="DC3545"/>
-                </a:solidFill>
-                <a:latin typeface="BIZ UDPGothic" pitchFamily="34" charset="0"/>
-                <a:ea typeface="BIZ UDPGothic" pitchFamily="34" charset="-122"/>
-                <a:cs typeface="BIZ UDPGothic" pitchFamily="34" charset="-120"/>
-              </a:rPr>
-              <a:t>まるごと消失</a:t>
+              <a:rPr lang="en-US" sz="1200" dirty="0">
+                <a:solidFill>
+                  <a:srgbClr val="2D3436"/>
+                </a:solidFill>
+                <a:latin typeface="BIZ UDPGothic" pitchFamily="34" charset="0"/>
+                <a:ea typeface="BIZ UDPGothic" pitchFamily="34" charset="-122"/>
+                <a:cs typeface="BIZ UDPGothic" pitchFamily="34" charset="-120"/>
+              </a:rPr>
+              <a:t>断片的に思い出せることがある</a:t>
             </a:r>
             <a:endParaRPr lang="en-US" sz="1200" dirty="0"/>
           </a:p>
@@ -4392,90 +4502,14 @@
       </p:sp>
       <p:sp>
         <p:nvSpPr>
-          <p:cNvPr id="18" name="Shape 16"/>
-          <p:cNvSpPr/>
-          <p:nvPr/>
-        </p:nvSpPr>
-        <p:spPr>
-          <a:xfrm>
-            <a:off x="274320" y="2880360"/>
-            <a:ext cx="8595360" cy="685800"/>
-          </a:xfrm>
-          <a:prstGeom prst="rect">
-            <a:avLst/>
-          </a:prstGeom>
-          <a:solidFill>
-            <a:srgbClr val="F5F7FA"/>
-          </a:solidFill>
-          <a:ln/>
-        </p:spPr>
-      </p:sp>
-      <p:sp>
-        <p:nvSpPr>
-          <p:cNvPr id="19" name="Text 17"/>
-          <p:cNvSpPr/>
-          <p:nvPr/>
-        </p:nvSpPr>
-        <p:spPr>
-          <a:xfrm>
-            <a:off x="274320" y="2880360"/>
-            <a:ext cx="1828800" cy="685800"/>
-          </a:xfrm>
-          <a:prstGeom prst="rect">
-            <a:avLst/>
-          </a:prstGeom>
-          <a:noFill/>
-          <a:ln/>
-        </p:spPr>
-        <p:txBody>
-          <a:bodyPr wrap="square" lIns="25400" tIns="25400" rIns="25400" bIns="25400" rtlCol="0" anchor="ctr"/>
-          <a:lstStyle/>
-          <a:p>
-            <a:pPr algn="ctr" indent="0" marL="0">
-              <a:buNone/>
-            </a:pPr>
-            <a:r>
-              <a:rPr lang="en-US" sz="1200" b="1" dirty="0">
-                <a:solidFill>
-                  <a:srgbClr val="2C5AA0"/>
-                </a:solidFill>
-                <a:latin typeface="BIZ UDPGothic" pitchFamily="34" charset="0"/>
-                <a:ea typeface="BIZ UDPGothic" pitchFamily="34" charset="-122"/>
-                <a:cs typeface="BIZ UDPGothic" pitchFamily="34" charset="-120"/>
-              </a:rPr>
-              <a:t>ヒントで</a:t>
-            </a:r>
-            <a:endParaRPr lang="en-US" sz="1200" dirty="0"/>
-          </a:p>
-          <a:p>
-            <a:pPr algn="ctr" indent="0" marL="0">
-              <a:buNone/>
-            </a:pPr>
-            <a:r>
-              <a:rPr lang="en-US" sz="1200" b="1" dirty="0">
-                <a:solidFill>
-                  <a:srgbClr val="2C5AA0"/>
-                </a:solidFill>
-                <a:latin typeface="BIZ UDPGothic" pitchFamily="34" charset="0"/>
-                <a:ea typeface="BIZ UDPGothic" pitchFamily="34" charset="-122"/>
-                <a:cs typeface="BIZ UDPGothic" pitchFamily="34" charset="-120"/>
-              </a:rPr>
-              <a:t>思い出せるか</a:t>
-            </a:r>
-            <a:endParaRPr lang="en-US" sz="1200" dirty="0"/>
-          </a:p>
-        </p:txBody>
-      </p:sp>
-      <p:sp>
-        <p:nvSpPr>
-          <p:cNvPr id="20" name="Text 18"/>
-          <p:cNvSpPr/>
-          <p:nvPr/>
-        </p:nvSpPr>
-        <p:spPr>
-          <a:xfrm>
-            <a:off x="2103120" y="2880360"/>
-            <a:ext cx="3291840" cy="685800"/>
+          <p:cNvPr id="21" name="Text 19"/>
+          <p:cNvSpPr/>
+          <p:nvPr/>
+        </p:nvSpPr>
+        <p:spPr>
+          <a:xfrm>
+            <a:off x="5303520" y="2633472"/>
+            <a:ext cx="3566160" cy="585216"/>
           </a:xfrm>
           <a:prstGeom prst="rect">
             <a:avLst/>
@@ -4489,40 +4523,40 @@
           <a:p>
             <a:pPr indent="0" marL="0">
               <a:lnSpc>
-                <a:spcPct val="120000"/>
+                <a:spcPct val="115000"/>
               </a:lnSpc>
               <a:buNone/>
             </a:pPr>
             <a:r>
-              <a:rPr lang="en-US" sz="1200" dirty="0">
-                <a:solidFill>
-                  <a:srgbClr val="2D3436"/>
-                </a:solidFill>
-                <a:latin typeface="BIZ UDPGothic" pitchFamily="34" charset="0"/>
-                <a:ea typeface="BIZ UDPGothic" pitchFamily="34" charset="-122"/>
-                <a:cs typeface="BIZ UDPGothic" pitchFamily="34" charset="-120"/>
-              </a:rPr>
-              <a:t>断片的に思い出せる</a:t>
+              <a:rPr lang="en-US" sz="1200" b="1" dirty="0">
+                <a:solidFill>
+                  <a:srgbClr val="DC3545"/>
+                </a:solidFill>
+                <a:latin typeface="BIZ UDPGothic" pitchFamily="34" charset="0"/>
+                <a:ea typeface="BIZ UDPGothic" pitchFamily="34" charset="-122"/>
+                <a:cs typeface="BIZ UDPGothic" pitchFamily="34" charset="-120"/>
+              </a:rPr>
+              <a:t>いくらヒントを出されても</a:t>
             </a:r>
             <a:endParaRPr lang="en-US" sz="1200" dirty="0"/>
           </a:p>
           <a:p>
             <a:pPr indent="0" marL="0">
               <a:lnSpc>
-                <a:spcPct val="120000"/>
+                <a:spcPct val="115000"/>
               </a:lnSpc>
               <a:buNone/>
             </a:pPr>
             <a:r>
-              <a:rPr lang="en-US" sz="1200" dirty="0">
-                <a:solidFill>
-                  <a:srgbClr val="2D3436"/>
-                </a:solidFill>
-                <a:latin typeface="BIZ UDPGothic" pitchFamily="34" charset="0"/>
-                <a:ea typeface="BIZ UDPGothic" pitchFamily="34" charset="-122"/>
-                <a:cs typeface="BIZ UDPGothic" pitchFamily="34" charset="-120"/>
-              </a:rPr>
-              <a:t>ことがある</a:t>
+              <a:rPr lang="en-US" sz="1200" b="1" dirty="0">
+                <a:solidFill>
+                  <a:srgbClr val="DC3545"/>
+                </a:solidFill>
+                <a:latin typeface="BIZ UDPGothic" pitchFamily="34" charset="0"/>
+                <a:ea typeface="BIZ UDPGothic" pitchFamily="34" charset="-122"/>
+                <a:cs typeface="BIZ UDPGothic" pitchFamily="34" charset="-120"/>
+              </a:rPr>
+              <a:t>思い出せない</a:t>
             </a:r>
             <a:endParaRPr lang="en-US" sz="1200" dirty="0"/>
           </a:p>
@@ -4530,14 +4564,96 @@
       </p:sp>
       <p:sp>
         <p:nvSpPr>
-          <p:cNvPr id="21" name="Text 19"/>
-          <p:cNvSpPr/>
-          <p:nvPr/>
-        </p:nvSpPr>
-        <p:spPr>
-          <a:xfrm>
-            <a:off x="5394960" y="2880360"/>
-            <a:ext cx="3474720" cy="685800"/>
+          <p:cNvPr id="22" name="Shape 20"/>
+          <p:cNvSpPr/>
+          <p:nvPr/>
+        </p:nvSpPr>
+        <p:spPr>
+          <a:xfrm>
+            <a:off x="274320" y="3218688"/>
+            <a:ext cx="8595360" cy="585216"/>
+          </a:xfrm>
+          <a:prstGeom prst="rect">
+            <a:avLst/>
+          </a:prstGeom>
+          <a:solidFill>
+            <a:srgbClr val="FFFFFF"/>
+          </a:solidFill>
+          <a:ln/>
+        </p:spPr>
+      </p:sp>
+      <p:sp>
+        <p:nvSpPr>
+          <p:cNvPr id="23" name="Text 21"/>
+          <p:cNvSpPr/>
+          <p:nvPr/>
+        </p:nvSpPr>
+        <p:spPr>
+          <a:xfrm>
+            <a:off x="274320" y="3218688"/>
+            <a:ext cx="1645920" cy="585216"/>
+          </a:xfrm>
+          <a:prstGeom prst="rect">
+            <a:avLst/>
+          </a:prstGeom>
+          <a:noFill/>
+          <a:ln/>
+        </p:spPr>
+        <p:txBody>
+          <a:bodyPr wrap="square" lIns="25400" tIns="25400" rIns="25400" bIns="25400" rtlCol="0" anchor="ctr"/>
+          <a:lstStyle/>
+          <a:p>
+            <a:pPr algn="ctr" indent="0" marL="0">
+              <a:lnSpc>
+                <a:spcPct val="115000"/>
+              </a:lnSpc>
+              <a:buNone/>
+            </a:pPr>
+            <a:r>
+              <a:rPr lang="en-US" sz="1100" b="1" dirty="0">
+                <a:solidFill>
+                  <a:srgbClr val="2C5AA0"/>
+                </a:solidFill>
+                <a:latin typeface="BIZ UDPGothic" pitchFamily="34" charset="0"/>
+                <a:ea typeface="BIZ UDPGothic" pitchFamily="34" charset="-122"/>
+                <a:cs typeface="BIZ UDPGothic" pitchFamily="34" charset="-120"/>
+              </a:rPr>
+              <a:t>血中アルコール</a:t>
+            </a:r>
+            <a:endParaRPr lang="en-US" sz="1100" dirty="0"/>
+          </a:p>
+          <a:p>
+            <a:pPr algn="ctr" indent="0" marL="0">
+              <a:lnSpc>
+                <a:spcPct val="115000"/>
+              </a:lnSpc>
+              <a:buNone/>
+            </a:pPr>
+            <a:r>
+              <a:rPr lang="en-US" sz="1100" b="1" dirty="0">
+                <a:solidFill>
+                  <a:srgbClr val="2C5AA0"/>
+                </a:solidFill>
+                <a:latin typeface="BIZ UDPGothic" pitchFamily="34" charset="0"/>
+                <a:ea typeface="BIZ UDPGothic" pitchFamily="34" charset="-122"/>
+                <a:cs typeface="BIZ UDPGothic" pitchFamily="34" charset="-120"/>
+              </a:rPr>
+              <a:t>濃度</a:t>
+            </a:r>
+            <a:endParaRPr lang="en-US" sz="1100" dirty="0"/>
+          </a:p>
+        </p:txBody>
+      </p:sp>
+      <p:sp>
+        <p:nvSpPr>
+          <p:cNvPr id="24" name="Text 22"/>
+          <p:cNvSpPr/>
+          <p:nvPr/>
+        </p:nvSpPr>
+        <p:spPr>
+          <a:xfrm>
+            <a:off x="1920240" y="3218688"/>
+            <a:ext cx="3383280" cy="585216"/>
           </a:xfrm>
           <a:prstGeom prst="rect">
             <a:avLst/>
@@ -4551,27 +4667,49 @@
           <a:p>
             <a:pPr indent="0" marL="0">
               <a:lnSpc>
-                <a:spcPct val="120000"/>
+                <a:spcPct val="115000"/>
               </a:lnSpc>
               <a:buNone/>
             </a:pPr>
             <a:r>
-              <a:rPr lang="en-US" sz="1200" b="1" dirty="0">
-                <a:solidFill>
-                  <a:srgbClr val="DC3545"/>
-                </a:solidFill>
-                <a:latin typeface="BIZ UDPGothic" pitchFamily="34" charset="0"/>
-                <a:ea typeface="BIZ UDPGothic" pitchFamily="34" charset="-122"/>
-                <a:cs typeface="BIZ UDPGothic" pitchFamily="34" charset="-120"/>
-              </a:rPr>
-              <a:t>いくらヒントを出されても</a:t>
+              <a:rPr lang="en-US" sz="1200" dirty="0">
+                <a:solidFill>
+                  <a:srgbClr val="2D3436"/>
+                </a:solidFill>
+                <a:latin typeface="BIZ UDPGothic" pitchFamily="34" charset="0"/>
+                <a:ea typeface="BIZ UDPGothic" pitchFamily="34" charset="-122"/>
+                <a:cs typeface="BIZ UDPGothic" pitchFamily="34" charset="-120"/>
+              </a:rPr>
+              <a:t>比較的低め</a:t>
             </a:r>
             <a:endParaRPr lang="en-US" sz="1200" dirty="0"/>
           </a:p>
+        </p:txBody>
+      </p:sp>
+      <p:sp>
+        <p:nvSpPr>
+          <p:cNvPr id="25" name="Text 23"/>
+          <p:cNvSpPr/>
+          <p:nvPr/>
+        </p:nvSpPr>
+        <p:spPr>
+          <a:xfrm>
+            <a:off x="5303520" y="3218688"/>
+            <a:ext cx="3566160" cy="585216"/>
+          </a:xfrm>
+          <a:prstGeom prst="rect">
+            <a:avLst/>
+          </a:prstGeom>
+          <a:noFill/>
+          <a:ln/>
+        </p:spPr>
+        <p:txBody>
+          <a:bodyPr wrap="square" lIns="0" tIns="101600" rIns="101600" bIns="0" rtlCol="0" anchor="ctr"/>
+          <a:lstStyle/>
           <a:p>
             <a:pPr indent="0" marL="0">
               <a:lnSpc>
-                <a:spcPct val="120000"/>
+                <a:spcPct val="115000"/>
               </a:lnSpc>
               <a:buNone/>
             </a:pPr>
@@ -4584,7 +4722,7 @@
                 <a:ea typeface="BIZ UDPGothic" pitchFamily="34" charset="-122"/>
                 <a:cs typeface="BIZ UDPGothic" pitchFamily="34" charset="-120"/>
               </a:rPr>
-              <a:t>思い出せない</a:t>
+              <a:t>高値（0.15%以上が多い）</a:t>
             </a:r>
             <a:endParaRPr lang="en-US" sz="1200" dirty="0"/>
           </a:p>
@@ -4592,34 +4730,34 @@
       </p:sp>
       <p:sp>
         <p:nvSpPr>
-          <p:cNvPr id="22" name="Shape 20"/>
-          <p:cNvSpPr/>
-          <p:nvPr/>
-        </p:nvSpPr>
-        <p:spPr>
-          <a:xfrm>
-            <a:off x="274320" y="3566160"/>
-            <a:ext cx="8595360" cy="685800"/>
-          </a:xfrm>
-          <a:prstGeom prst="rect">
-            <a:avLst/>
-          </a:prstGeom>
-          <a:solidFill>
-            <a:srgbClr val="FFFFFF"/>
-          </a:solidFill>
-          <a:ln/>
-        </p:spPr>
-      </p:sp>
-      <p:sp>
-        <p:nvSpPr>
-          <p:cNvPr id="23" name="Text 21"/>
-          <p:cNvSpPr/>
-          <p:nvPr/>
-        </p:nvSpPr>
-        <p:spPr>
-          <a:xfrm>
-            <a:off x="274320" y="3566160"/>
-            <a:ext cx="1828800" cy="685800"/>
+          <p:cNvPr id="26" name="Shape 24"/>
+          <p:cNvSpPr/>
+          <p:nvPr/>
+        </p:nvSpPr>
+        <p:spPr>
+          <a:xfrm>
+            <a:off x="274320" y="3803904"/>
+            <a:ext cx="8595360" cy="585216"/>
+          </a:xfrm>
+          <a:prstGeom prst="rect">
+            <a:avLst/>
+          </a:prstGeom>
+          <a:solidFill>
+            <a:srgbClr val="F5F7FA"/>
+          </a:solidFill>
+          <a:ln/>
+        </p:spPr>
+      </p:sp>
+      <p:sp>
+        <p:nvSpPr>
+          <p:cNvPr id="27" name="Text 25"/>
+          <p:cNvSpPr/>
+          <p:nvPr/>
+        </p:nvSpPr>
+        <p:spPr>
+          <a:xfrm>
+            <a:off x="274320" y="3803904"/>
+            <a:ext cx="1645920" cy="585216"/>
           </a:xfrm>
           <a:prstGeom prst="rect">
             <a:avLst/>
@@ -4632,10 +4770,13 @@
           <a:lstStyle/>
           <a:p>
             <a:pPr algn="ctr" indent="0" marL="0">
-              <a:buNone/>
-            </a:pPr>
-            <a:r>
-              <a:rPr lang="en-US" sz="1200" b="1" dirty="0">
+              <a:lnSpc>
+                <a:spcPct val="115000"/>
+              </a:lnSpc>
+              <a:buNone/>
+            </a:pPr>
+            <a:r>
+              <a:rPr lang="en-US" sz="1100" b="1" dirty="0">
                 <a:solidFill>
                   <a:srgbClr val="2C5AA0"/>
                 </a:solidFill>
@@ -4643,39 +4784,22 @@
                 <a:ea typeface="BIZ UDPGothic" pitchFamily="34" charset="-122"/>
                 <a:cs typeface="BIZ UDPGothic" pitchFamily="34" charset="-120"/>
               </a:rPr>
-              <a:t>血中</a:t>
-            </a:r>
-            <a:endParaRPr lang="en-US" sz="1200" dirty="0"/>
-          </a:p>
-          <a:p>
-            <a:pPr algn="ctr" indent="0" marL="0">
-              <a:buNone/>
-            </a:pPr>
-            <a:r>
-              <a:rPr lang="en-US" sz="1200" b="1" dirty="0">
-                <a:solidFill>
-                  <a:srgbClr val="2C5AA0"/>
-                </a:solidFill>
-                <a:latin typeface="BIZ UDPGothic" pitchFamily="34" charset="0"/>
-                <a:ea typeface="BIZ UDPGothic" pitchFamily="34" charset="-122"/>
-                <a:cs typeface="BIZ UDPGothic" pitchFamily="34" charset="-120"/>
-              </a:rPr>
-              <a:t>アルコール濃度</a:t>
-            </a:r>
-            <a:endParaRPr lang="en-US" sz="1200" dirty="0"/>
-          </a:p>
-        </p:txBody>
-      </p:sp>
-      <p:sp>
-        <p:nvSpPr>
-          <p:cNvPr id="24" name="Text 22"/>
-          <p:cNvSpPr/>
-          <p:nvPr/>
-        </p:nvSpPr>
-        <p:spPr>
-          <a:xfrm>
-            <a:off x="2103120" y="3566160"/>
-            <a:ext cx="3291840" cy="685800"/>
+              <a:t>深刻度</a:t>
+            </a:r>
+            <a:endParaRPr lang="en-US" sz="1100" dirty="0"/>
+          </a:p>
+        </p:txBody>
+      </p:sp>
+      <p:sp>
+        <p:nvSpPr>
+          <p:cNvPr id="28" name="Text 26"/>
+          <p:cNvSpPr/>
+          <p:nvPr/>
+        </p:nvSpPr>
+        <p:spPr>
+          <a:xfrm>
+            <a:off x="1920240" y="3803904"/>
+            <a:ext cx="3383280" cy="585216"/>
           </a:xfrm>
           <a:prstGeom prst="rect">
             <a:avLst/>
@@ -4689,7 +4813,7 @@
           <a:p>
             <a:pPr indent="0" marL="0">
               <a:lnSpc>
-                <a:spcPct val="120000"/>
+                <a:spcPct val="115000"/>
               </a:lnSpc>
               <a:buNone/>
             </a:pPr>
@@ -4702,7 +4826,7 @@
                 <a:ea typeface="BIZ UDPGothic" pitchFamily="34" charset="-122"/>
                 <a:cs typeface="BIZ UDPGothic" pitchFamily="34" charset="-120"/>
               </a:rPr>
-              <a:t>比較的低め</a:t>
+              <a:t>より一般的</a:t>
             </a:r>
             <a:endParaRPr lang="en-US" sz="1200" dirty="0"/>
           </a:p>
@@ -4710,14 +4834,14 @@
       </p:sp>
       <p:sp>
         <p:nvSpPr>
-          <p:cNvPr id="25" name="Text 23"/>
-          <p:cNvSpPr/>
-          <p:nvPr/>
-        </p:nvSpPr>
-        <p:spPr>
-          <a:xfrm>
-            <a:off x="5394960" y="3566160"/>
-            <a:ext cx="3474720" cy="685800"/>
+          <p:cNvPr id="29" name="Text 27"/>
+          <p:cNvSpPr/>
+          <p:nvPr/>
+        </p:nvSpPr>
+        <p:spPr>
+          <a:xfrm>
+            <a:off x="5303520" y="3803904"/>
+            <a:ext cx="3566160" cy="585216"/>
           </a:xfrm>
           <a:prstGeom prst="rect">
             <a:avLst/>
@@ -4731,7 +4855,7 @@
           <a:p>
             <a:pPr indent="0" marL="0">
               <a:lnSpc>
-                <a:spcPct val="120000"/>
+                <a:spcPct val="115000"/>
               </a:lnSpc>
               <a:buNone/>
             </a:pPr>
@@ -4744,193 +4868,10 @@
                 <a:ea typeface="BIZ UDPGothic" pitchFamily="34" charset="-122"/>
                 <a:cs typeface="BIZ UDPGothic" pitchFamily="34" charset="-120"/>
               </a:rPr>
-              <a:t>高値</a:t>
+              <a:t>より深刻（問題飲酒と関連）</a:t>
             </a:r>
             <a:endParaRPr lang="en-US" sz="1200" dirty="0"/>
           </a:p>
-          <a:p>
-            <a:pPr indent="0" marL="0">
-              <a:lnSpc>
-                <a:spcPct val="120000"/>
-              </a:lnSpc>
-              <a:buNone/>
-            </a:pPr>
-            <a:r>
-              <a:rPr lang="en-US" sz="1200" b="1" dirty="0">
-                <a:solidFill>
-                  <a:srgbClr val="DC3545"/>
-                </a:solidFill>
-                <a:latin typeface="BIZ UDPGothic" pitchFamily="34" charset="0"/>
-                <a:ea typeface="BIZ UDPGothic" pitchFamily="34" charset="-122"/>
-                <a:cs typeface="BIZ UDPGothic" pitchFamily="34" charset="-120"/>
-              </a:rPr>
-              <a:t>（0.15%以上が多い）</a:t>
-            </a:r>
-            <a:endParaRPr lang="en-US" sz="1200" dirty="0"/>
-          </a:p>
-        </p:txBody>
-      </p:sp>
-      <p:sp>
-        <p:nvSpPr>
-          <p:cNvPr id="26" name="Shape 24"/>
-          <p:cNvSpPr/>
-          <p:nvPr/>
-        </p:nvSpPr>
-        <p:spPr>
-          <a:xfrm>
-            <a:off x="274320" y="4251960"/>
-            <a:ext cx="8595360" cy="685800"/>
-          </a:xfrm>
-          <a:prstGeom prst="rect">
-            <a:avLst/>
-          </a:prstGeom>
-          <a:solidFill>
-            <a:srgbClr val="F5F7FA"/>
-          </a:solidFill>
-          <a:ln/>
-        </p:spPr>
-      </p:sp>
-      <p:sp>
-        <p:nvSpPr>
-          <p:cNvPr id="27" name="Text 25"/>
-          <p:cNvSpPr/>
-          <p:nvPr/>
-        </p:nvSpPr>
-        <p:spPr>
-          <a:xfrm>
-            <a:off x="274320" y="4251960"/>
-            <a:ext cx="1828800" cy="685800"/>
-          </a:xfrm>
-          <a:prstGeom prst="rect">
-            <a:avLst/>
-          </a:prstGeom>
-          <a:noFill/>
-          <a:ln/>
-        </p:spPr>
-        <p:txBody>
-          <a:bodyPr wrap="square" lIns="25400" tIns="25400" rIns="25400" bIns="25400" rtlCol="0" anchor="ctr"/>
-          <a:lstStyle/>
-          <a:p>
-            <a:pPr algn="ctr" indent="0" marL="0">
-              <a:buNone/>
-            </a:pPr>
-            <a:r>
-              <a:rPr lang="en-US" sz="1200" b="1" dirty="0">
-                <a:solidFill>
-                  <a:srgbClr val="2C5AA0"/>
-                </a:solidFill>
-                <a:latin typeface="BIZ UDPGothic" pitchFamily="34" charset="0"/>
-                <a:ea typeface="BIZ UDPGothic" pitchFamily="34" charset="-122"/>
-                <a:cs typeface="BIZ UDPGothic" pitchFamily="34" charset="-120"/>
-              </a:rPr>
-              <a:t>深刻度</a:t>
-            </a:r>
-            <a:endParaRPr lang="en-US" sz="1200" dirty="0"/>
-          </a:p>
-        </p:txBody>
-      </p:sp>
-      <p:sp>
-        <p:nvSpPr>
-          <p:cNvPr id="28" name="Text 26"/>
-          <p:cNvSpPr/>
-          <p:nvPr/>
-        </p:nvSpPr>
-        <p:spPr>
-          <a:xfrm>
-            <a:off x="2103120" y="4251960"/>
-            <a:ext cx="3291840" cy="685800"/>
-          </a:xfrm>
-          <a:prstGeom prst="rect">
-            <a:avLst/>
-          </a:prstGeom>
-          <a:noFill/>
-          <a:ln/>
-        </p:spPr>
-        <p:txBody>
-          <a:bodyPr wrap="square" lIns="0" tIns="101600" rIns="101600" bIns="0" rtlCol="0" anchor="ctr"/>
-          <a:lstStyle/>
-          <a:p>
-            <a:pPr indent="0" marL="0">
-              <a:lnSpc>
-                <a:spcPct val="120000"/>
-              </a:lnSpc>
-              <a:buNone/>
-            </a:pPr>
-            <a:r>
-              <a:rPr lang="en-US" sz="1200" dirty="0">
-                <a:solidFill>
-                  <a:srgbClr val="2D3436"/>
-                </a:solidFill>
-                <a:latin typeface="BIZ UDPGothic" pitchFamily="34" charset="0"/>
-                <a:ea typeface="BIZ UDPGothic" pitchFamily="34" charset="-122"/>
-                <a:cs typeface="BIZ UDPGothic" pitchFamily="34" charset="-120"/>
-              </a:rPr>
-              <a:t>より一般的</a:t>
-            </a:r>
-            <a:endParaRPr lang="en-US" sz="1200" dirty="0"/>
-          </a:p>
-        </p:txBody>
-      </p:sp>
-      <p:sp>
-        <p:nvSpPr>
-          <p:cNvPr id="29" name="Text 27"/>
-          <p:cNvSpPr/>
-          <p:nvPr/>
-        </p:nvSpPr>
-        <p:spPr>
-          <a:xfrm>
-            <a:off x="5394960" y="4251960"/>
-            <a:ext cx="3474720" cy="685800"/>
-          </a:xfrm>
-          <a:prstGeom prst="rect">
-            <a:avLst/>
-          </a:prstGeom>
-          <a:noFill/>
-          <a:ln/>
-        </p:spPr>
-        <p:txBody>
-          <a:bodyPr wrap="square" lIns="0" tIns="101600" rIns="101600" bIns="0" rtlCol="0" anchor="ctr"/>
-          <a:lstStyle/>
-          <a:p>
-            <a:pPr indent="0" marL="0">
-              <a:lnSpc>
-                <a:spcPct val="120000"/>
-              </a:lnSpc>
-              <a:buNone/>
-            </a:pPr>
-            <a:r>
-              <a:rPr lang="en-US" sz="1200" b="1" dirty="0">
-                <a:solidFill>
-                  <a:srgbClr val="DC3545"/>
-                </a:solidFill>
-                <a:latin typeface="BIZ UDPGothic" pitchFamily="34" charset="0"/>
-                <a:ea typeface="BIZ UDPGothic" pitchFamily="34" charset="-122"/>
-                <a:cs typeface="BIZ UDPGothic" pitchFamily="34" charset="-120"/>
-              </a:rPr>
-              <a:t>より深刻</a:t>
-            </a:r>
-            <a:endParaRPr lang="en-US" sz="1200" dirty="0"/>
-          </a:p>
-          <a:p>
-            <a:pPr indent="0" marL="0">
-              <a:lnSpc>
-                <a:spcPct val="120000"/>
-              </a:lnSpc>
-              <a:buNone/>
-            </a:pPr>
-            <a:r>
-              <a:rPr lang="en-US" sz="1200" b="1" dirty="0">
-                <a:solidFill>
-                  <a:srgbClr val="DC3545"/>
-                </a:solidFill>
-                <a:latin typeface="BIZ UDPGothic" pitchFamily="34" charset="0"/>
-                <a:ea typeface="BIZ UDPGothic" pitchFamily="34" charset="-122"/>
-                <a:cs typeface="BIZ UDPGothic" pitchFamily="34" charset="-120"/>
-              </a:rPr>
-              <a:t>（問題飲酒と関連）</a:t>
-            </a:r>
-            <a:endParaRPr lang="en-US" sz="1200" dirty="0"/>
-          </a:p>
         </p:txBody>
       </p:sp>
       <p:sp>
@@ -4941,7 +4882,7 @@
         </p:nvSpPr>
         <p:spPr>
           <a:xfrm>
-            <a:off x="274320" y="4663440"/>
+            <a:off x="274320" y="4526280"/>
             <a:ext cx="8595360" cy="384048"/>
           </a:xfrm>
           <a:prstGeom prst="rect">
@@ -4961,7 +4902,7 @@
         </p:nvSpPr>
         <p:spPr>
           <a:xfrm>
-            <a:off x="457200" y="4663440"/>
+            <a:off x="457200" y="4526280"/>
             <a:ext cx="8229600" cy="384048"/>
           </a:xfrm>
           <a:prstGeom prst="rect">
@@ -7899,12 +7840,12 @@
         </p:nvSpPr>
         <p:spPr>
           <a:xfrm>
-            <a:off x="731520" y="1005840"/>
-            <a:ext cx="7680960" cy="685800"/>
+            <a:off x="548640" y="960120"/>
+            <a:ext cx="8046720" cy="658368"/>
           </a:xfrm>
           <a:prstGeom prst="roundRect">
             <a:avLst>
-              <a:gd name="adj" fmla="val 13333"/>
+              <a:gd name="adj" fmla="val 13889"/>
             </a:avLst>
           </a:prstGeom>
           <a:solidFill>
@@ -7921,8 +7862,8 @@
         </p:nvSpPr>
         <p:spPr>
           <a:xfrm>
-            <a:off x="914400" y="1097280"/>
-            <a:ext cx="502920" cy="502920"/>
+            <a:off x="731520" y="1033272"/>
+            <a:ext cx="475488" cy="475488"/>
           </a:xfrm>
           <a:prstGeom prst="ellipse">
             <a:avLst/>
@@ -7941,8 +7882,8 @@
         </p:nvSpPr>
         <p:spPr>
           <a:xfrm>
-            <a:off x="914400" y="1097280"/>
-            <a:ext cx="502920" cy="502920"/>
+            <a:off x="731520" y="1033272"/>
+            <a:ext cx="475488" cy="475488"/>
           </a:xfrm>
           <a:prstGeom prst="rect">
             <a:avLst/>
@@ -7958,7 +7899,7 @@
               <a:buNone/>
             </a:pPr>
             <a:r>
-              <a:rPr lang="en-US" sz="2000" b="1" dirty="0">
+              <a:rPr lang="en-US" sz="1800" b="1" dirty="0">
                 <a:solidFill>
                   <a:srgbClr val="FFFFFF"/>
                 </a:solidFill>
@@ -7968,7 +7909,7 @@
               </a:rPr>
               <a:t>1</a:t>
             </a:r>
-            <a:endParaRPr lang="en-US" sz="2000" dirty="0"/>
+            <a:endParaRPr lang="en-US" sz="1800" dirty="0"/>
           </a:p>
         </p:txBody>
       </p:sp>
@@ -7980,8 +7921,8 @@
         </p:nvSpPr>
         <p:spPr>
           <a:xfrm>
-            <a:off x="1600200" y="1005840"/>
-            <a:ext cx="6583680" cy="685800"/>
+            <a:off x="1417320" y="960120"/>
+            <a:ext cx="6995160" cy="658368"/>
           </a:xfrm>
           <a:prstGeom prst="rect">
             <a:avLst/>
@@ -8000,7 +7941,7 @@
               <a:buNone/>
             </a:pPr>
             <a:r>
-              <a:rPr lang="en-US" sz="1400" dirty="0">
+              <a:rPr lang="en-US" sz="1300" dirty="0">
                 <a:solidFill>
                   <a:srgbClr val="E8F0FE"/>
                 </a:solidFill>
@@ -8008,9 +7949,9 @@
                 <a:ea typeface="BIZ UDPGothic" pitchFamily="34" charset="-122"/>
                 <a:cs typeface="BIZ UDPGothic" pitchFamily="34" charset="-120"/>
               </a:rPr>
-              <a:t>ブラックアウトは記憶が「消えた」のではなく</a:t>
-            </a:r>
-            <a:endParaRPr lang="en-US" sz="1400" dirty="0"/>
+              <a:t>ブラックアウトは記憶が「消えた」のではなく「最初から作られなかった」</a:t>
+            </a:r>
+            <a:endParaRPr lang="en-US" sz="1300" dirty="0"/>
           </a:p>
           <a:p>
             <a:pPr indent="0" marL="0">
@@ -8020,7 +7961,7 @@
               <a:buNone/>
             </a:pPr>
             <a:r>
-              <a:rPr lang="en-US" sz="1400" dirty="0">
+              <a:rPr lang="en-US" sz="1300" dirty="0">
                 <a:solidFill>
                   <a:srgbClr val="E8F0FE"/>
                 </a:solidFill>
@@ -8028,9 +7969,9 @@
                 <a:ea typeface="BIZ UDPGothic" pitchFamily="34" charset="-122"/>
                 <a:cs typeface="BIZ UDPGothic" pitchFamily="34" charset="-120"/>
               </a:rPr>
-              <a:t>「最初から作られなかった」 ― 海馬のLTPがブロックされるため</a:t>
-            </a:r>
-            <a:endParaRPr lang="en-US" sz="1400" dirty="0"/>
+              <a:t>― 海馬のLTPがブロックされるため</a:t>
+            </a:r>
+            <a:endParaRPr lang="en-US" sz="1300" dirty="0"/>
           </a:p>
         </p:txBody>
       </p:sp>
@@ -8042,12 +7983,12 @@
         </p:nvSpPr>
         <p:spPr>
           <a:xfrm>
-            <a:off x="731520" y="1792224"/>
-            <a:ext cx="7680960" cy="685800"/>
+            <a:off x="548640" y="1691640"/>
+            <a:ext cx="8046720" cy="658368"/>
           </a:xfrm>
           <a:prstGeom prst="roundRect">
             <a:avLst>
-              <a:gd name="adj" fmla="val 13333"/>
+              <a:gd name="adj" fmla="val 13889"/>
             </a:avLst>
           </a:prstGeom>
           <a:solidFill>
@@ -8064,8 +8005,8 @@
         </p:nvSpPr>
         <p:spPr>
           <a:xfrm>
-            <a:off x="914400" y="1883664"/>
-            <a:ext cx="502920" cy="502920"/>
+            <a:off x="731520" y="1764792"/>
+            <a:ext cx="475488" cy="475488"/>
           </a:xfrm>
           <a:prstGeom prst="ellipse">
             <a:avLst/>
@@ -8084,8 +8025,8 @@
         </p:nvSpPr>
         <p:spPr>
           <a:xfrm>
-            <a:off x="914400" y="1883664"/>
-            <a:ext cx="502920" cy="502920"/>
+            <a:off x="731520" y="1764792"/>
+            <a:ext cx="475488" cy="475488"/>
           </a:xfrm>
           <a:prstGeom prst="rect">
             <a:avLst/>
@@ -8101,7 +8042,7 @@
               <a:buNone/>
             </a:pPr>
             <a:r>
-              <a:rPr lang="en-US" sz="2000" b="1" dirty="0">
+              <a:rPr lang="en-US" sz="1800" b="1" dirty="0">
                 <a:solidFill>
                   <a:srgbClr val="FFFFFF"/>
                 </a:solidFill>
@@ -8111,7 +8052,7 @@
               </a:rPr>
               <a:t>2</a:t>
             </a:r>
-            <a:endParaRPr lang="en-US" sz="2000" dirty="0"/>
+            <a:endParaRPr lang="en-US" sz="1800" dirty="0"/>
           </a:p>
         </p:txBody>
       </p:sp>
@@ -8123,8 +8064,8 @@
         </p:nvSpPr>
         <p:spPr>
           <a:xfrm>
-            <a:off x="1600200" y="1792224"/>
-            <a:ext cx="6583680" cy="685800"/>
+            <a:off x="1417320" y="1691640"/>
+            <a:ext cx="6995160" cy="658368"/>
           </a:xfrm>
           <a:prstGeom prst="rect">
             <a:avLst/>
@@ -8143,7 +8084,7 @@
               <a:buNone/>
             </a:pPr>
             <a:r>
-              <a:rPr lang="en-US" sz="1400" dirty="0">
+              <a:rPr lang="en-US" sz="1300" dirty="0">
                 <a:solidFill>
                   <a:srgbClr val="E8F0FE"/>
                 </a:solidFill>
@@ -8153,7 +8094,7 @@
               </a:rPr>
               <a:t>NMDA受容体遮断 ＋ GABA-A受容体増強の2重作用が記憶形成を妨げる</a:t>
             </a:r>
-            <a:endParaRPr lang="en-US" sz="1400" dirty="0"/>
+            <a:endParaRPr lang="en-US" sz="1300" dirty="0"/>
           </a:p>
         </p:txBody>
       </p:sp>
@@ -8165,12 +8106,12 @@
         </p:nvSpPr>
         <p:spPr>
           <a:xfrm>
-            <a:off x="731520" y="2578608"/>
-            <a:ext cx="7680960" cy="685800"/>
+            <a:off x="548640" y="2423160"/>
+            <a:ext cx="8046720" cy="658368"/>
           </a:xfrm>
           <a:prstGeom prst="roundRect">
             <a:avLst>
-              <a:gd name="adj" fmla="val 13333"/>
+              <a:gd name="adj" fmla="val 13889"/>
             </a:avLst>
           </a:prstGeom>
           <a:solidFill>
@@ -8187,8 +8128,8 @@
         </p:nvSpPr>
         <p:spPr>
           <a:xfrm>
-            <a:off x="914400" y="2670048"/>
-            <a:ext cx="502920" cy="502920"/>
+            <a:off x="731520" y="2496312"/>
+            <a:ext cx="475488" cy="475488"/>
           </a:xfrm>
           <a:prstGeom prst="ellipse">
             <a:avLst/>
@@ -8207,8 +8148,8 @@
         </p:nvSpPr>
         <p:spPr>
           <a:xfrm>
-            <a:off x="914400" y="2670048"/>
-            <a:ext cx="502920" cy="502920"/>
+            <a:off x="731520" y="2496312"/>
+            <a:ext cx="475488" cy="475488"/>
           </a:xfrm>
           <a:prstGeom prst="rect">
             <a:avLst/>
@@ -8224,7 +8165,7 @@
               <a:buNone/>
             </a:pPr>
             <a:r>
-              <a:rPr lang="en-US" sz="2000" b="1" dirty="0">
+              <a:rPr lang="en-US" sz="1800" b="1" dirty="0">
                 <a:solidFill>
                   <a:srgbClr val="FFFFFF"/>
                 </a:solidFill>
@@ -8234,7 +8175,7 @@
               </a:rPr>
               <a:t>3</a:t>
             </a:r>
-            <a:endParaRPr lang="en-US" sz="2000" dirty="0"/>
+            <a:endParaRPr lang="en-US" sz="1800" dirty="0"/>
           </a:p>
         </p:txBody>
       </p:sp>
@@ -8246,8 +8187,8 @@
         </p:nvSpPr>
         <p:spPr>
           <a:xfrm>
-            <a:off x="1600200" y="2578608"/>
-            <a:ext cx="6583680" cy="685800"/>
+            <a:off x="1417320" y="2423160"/>
+            <a:ext cx="6995160" cy="658368"/>
           </a:xfrm>
           <a:prstGeom prst="rect">
             <a:avLst/>
@@ -8266,7 +8207,7 @@
               <a:buNone/>
             </a:pPr>
             <a:r>
-              <a:rPr lang="en-US" sz="1400" dirty="0">
+              <a:rPr lang="en-US" sz="1300" dirty="0">
                 <a:solidFill>
                   <a:srgbClr val="E8F0FE"/>
                 </a:solidFill>
@@ -8274,10 +8215,113 @@
                 <a:ea typeface="BIZ UDPGothic" pitchFamily="34" charset="-122"/>
                 <a:cs typeface="BIZ UDPGothic" pitchFamily="34" charset="-120"/>
               </a:rPr>
-              <a:t>断片型（fragmentary）と完全型（en bloc）の2種類があり</a:t>
-            </a:r>
-            <a:endParaRPr lang="en-US" sz="1400" dirty="0"/>
-          </a:p>
+              <a:t>断片型と完全型の2種類があり、完全型のほうが深刻</a:t>
+            </a:r>
+            <a:endParaRPr lang="en-US" sz="1300" dirty="0"/>
+          </a:p>
+        </p:txBody>
+      </p:sp>
+      <p:sp>
+        <p:nvSpPr>
+          <p:cNvPr id="16" name="Shape 14"/>
+          <p:cNvSpPr/>
+          <p:nvPr/>
+        </p:nvSpPr>
+        <p:spPr>
+          <a:xfrm>
+            <a:off x="548640" y="3154680"/>
+            <a:ext cx="8046720" cy="658368"/>
+          </a:xfrm>
+          <a:prstGeom prst="roundRect">
+            <a:avLst>
+              <a:gd name="adj" fmla="val 13889"/>
+            </a:avLst>
+          </a:prstGeom>
+          <a:solidFill>
+            <a:srgbClr val="243B5C"/>
+          </a:solidFill>
+          <a:ln/>
+        </p:spPr>
+      </p:sp>
+      <p:sp>
+        <p:nvSpPr>
+          <p:cNvPr id="17" name="Shape 15"/>
+          <p:cNvSpPr/>
+          <p:nvPr/>
+        </p:nvSpPr>
+        <p:spPr>
+          <a:xfrm>
+            <a:off x="731520" y="3227832"/>
+            <a:ext cx="475488" cy="475488"/>
+          </a:xfrm>
+          <a:prstGeom prst="ellipse">
+            <a:avLst/>
+          </a:prstGeom>
+          <a:solidFill>
+            <a:srgbClr val="4A90D9"/>
+          </a:solidFill>
+          <a:ln/>
+        </p:spPr>
+      </p:sp>
+      <p:sp>
+        <p:nvSpPr>
+          <p:cNvPr id="18" name="Text 16"/>
+          <p:cNvSpPr/>
+          <p:nvPr/>
+        </p:nvSpPr>
+        <p:spPr>
+          <a:xfrm>
+            <a:off x="731520" y="3227832"/>
+            <a:ext cx="475488" cy="475488"/>
+          </a:xfrm>
+          <a:prstGeom prst="rect">
+            <a:avLst/>
+          </a:prstGeom>
+          <a:noFill/>
+          <a:ln/>
+        </p:spPr>
+        <p:txBody>
+          <a:bodyPr wrap="square" lIns="0" tIns="0" rIns="0" bIns="0" rtlCol="0" anchor="ctr"/>
+          <a:lstStyle/>
+          <a:p>
+            <a:pPr algn="ctr" indent="0" marL="0">
+              <a:buNone/>
+            </a:pPr>
+            <a:r>
+              <a:rPr lang="en-US" sz="1800" b="1" dirty="0">
+                <a:solidFill>
+                  <a:srgbClr val="FFFFFF"/>
+                </a:solidFill>
+                <a:latin typeface="Segoe UI" pitchFamily="34" charset="0"/>
+                <a:ea typeface="Segoe UI" pitchFamily="34" charset="-122"/>
+                <a:cs typeface="Segoe UI" pitchFamily="34" charset="-120"/>
+              </a:rPr>
+              <a:t>4</a:t>
+            </a:r>
+            <a:endParaRPr lang="en-US" sz="1800" dirty="0"/>
+          </a:p>
+        </p:txBody>
+      </p:sp>
+      <p:sp>
+        <p:nvSpPr>
+          <p:cNvPr id="19" name="Text 17"/>
+          <p:cNvSpPr/>
+          <p:nvPr/>
+        </p:nvSpPr>
+        <p:spPr>
+          <a:xfrm>
+            <a:off x="1417320" y="3154680"/>
+            <a:ext cx="6995160" cy="658368"/>
+          </a:xfrm>
+          <a:prstGeom prst="rect">
+            <a:avLst/>
+          </a:prstGeom>
+          <a:noFill/>
+          <a:ln/>
+        </p:spPr>
+        <p:txBody>
+          <a:bodyPr wrap="square" lIns="0" tIns="0" rIns="0" bIns="0" rtlCol="0" anchor="ctr"/>
+          <a:lstStyle/>
           <a:p>
             <a:pPr indent="0" marL="0">
               <a:lnSpc>
@@ -8286,7 +8330,7 @@
               <a:buNone/>
             </a:pPr>
             <a:r>
-              <a:rPr lang="en-US" sz="1400" dirty="0">
+              <a:rPr lang="en-US" sz="1300" dirty="0">
                 <a:solidFill>
                   <a:srgbClr val="E8F0FE"/>
                 </a:solidFill>
@@ -8294,26 +8338,26 @@
                 <a:ea typeface="BIZ UDPGothic" pitchFamily="34" charset="-122"/>
                 <a:cs typeface="BIZ UDPGothic" pitchFamily="34" charset="-120"/>
               </a:rPr>
-              <a:t>後者のほうが深刻</a:t>
-            </a:r>
-            <a:endParaRPr lang="en-US" sz="1400" dirty="0"/>
-          </a:p>
-        </p:txBody>
-      </p:sp>
-      <p:sp>
-        <p:nvSpPr>
-          <p:cNvPr id="16" name="Shape 14"/>
-          <p:cNvSpPr/>
-          <p:nvPr/>
-        </p:nvSpPr>
-        <p:spPr>
-          <a:xfrm>
-            <a:off x="731520" y="3364992"/>
-            <a:ext cx="7680960" cy="685800"/>
+              <a:t>急速飲酒・空腹・女性・若年者がリスク大。「酒が強い人」でも油断禁物</a:t>
+            </a:r>
+            <a:endParaRPr lang="en-US" sz="1300" dirty="0"/>
+          </a:p>
+        </p:txBody>
+      </p:sp>
+      <p:sp>
+        <p:nvSpPr>
+          <p:cNvPr id="20" name="Shape 18"/>
+          <p:cNvSpPr/>
+          <p:nvPr/>
+        </p:nvSpPr>
+        <p:spPr>
+          <a:xfrm>
+            <a:off x="548640" y="3886200"/>
+            <a:ext cx="8046720" cy="658368"/>
           </a:xfrm>
           <a:prstGeom prst="roundRect">
             <a:avLst>
-              <a:gd name="adj" fmla="val 13333"/>
+              <a:gd name="adj" fmla="val 13889"/>
             </a:avLst>
           </a:prstGeom>
           <a:solidFill>
@@ -8324,14 +8368,14 @@
       </p:sp>
       <p:sp>
         <p:nvSpPr>
-          <p:cNvPr id="17" name="Shape 15"/>
-          <p:cNvSpPr/>
-          <p:nvPr/>
-        </p:nvSpPr>
-        <p:spPr>
-          <a:xfrm>
-            <a:off x="914400" y="3456432"/>
-            <a:ext cx="502920" cy="502920"/>
+          <p:cNvPr id="21" name="Shape 19"/>
+          <p:cNvSpPr/>
+          <p:nvPr/>
+        </p:nvSpPr>
+        <p:spPr>
+          <a:xfrm>
+            <a:off x="731520" y="3959352"/>
+            <a:ext cx="475488" cy="475488"/>
           </a:xfrm>
           <a:prstGeom prst="ellipse">
             <a:avLst/>
@@ -8344,14 +8388,14 @@
       </p:sp>
       <p:sp>
         <p:nvSpPr>
-          <p:cNvPr id="18" name="Text 16"/>
-          <p:cNvSpPr/>
-          <p:nvPr/>
-        </p:nvSpPr>
-        <p:spPr>
-          <a:xfrm>
-            <a:off x="914400" y="3456432"/>
-            <a:ext cx="502920" cy="502920"/>
+          <p:cNvPr id="22" name="Text 20"/>
+          <p:cNvSpPr/>
+          <p:nvPr/>
+        </p:nvSpPr>
+        <p:spPr>
+          <a:xfrm>
+            <a:off x="731520" y="3959352"/>
+            <a:ext cx="475488" cy="475488"/>
           </a:xfrm>
           <a:prstGeom prst="rect">
             <a:avLst/>
@@ -8367,7 +8411,7 @@
               <a:buNone/>
             </a:pPr>
             <a:r>
-              <a:rPr lang="en-US" sz="2000" b="1" dirty="0">
+              <a:rPr lang="en-US" sz="1800" b="1" dirty="0">
                 <a:solidFill>
                   <a:srgbClr val="FFFFFF"/>
                 </a:solidFill>
@@ -8375,22 +8419,22 @@
                 <a:ea typeface="Segoe UI" pitchFamily="34" charset="-122"/>
                 <a:cs typeface="Segoe UI" pitchFamily="34" charset="-120"/>
               </a:rPr>
-              <a:t>4</a:t>
-            </a:r>
-            <a:endParaRPr lang="en-US" sz="2000" dirty="0"/>
-          </a:p>
-        </p:txBody>
-      </p:sp>
-      <p:sp>
-        <p:nvSpPr>
-          <p:cNvPr id="19" name="Text 17"/>
-          <p:cNvSpPr/>
-          <p:nvPr/>
-        </p:nvSpPr>
-        <p:spPr>
-          <a:xfrm>
-            <a:off x="1600200" y="3364992"/>
-            <a:ext cx="6583680" cy="685800"/>
+              <a:t>5</a:t>
+            </a:r>
+            <a:endParaRPr lang="en-US" sz="1800" dirty="0"/>
+          </a:p>
+        </p:txBody>
+      </p:sp>
+      <p:sp>
+        <p:nvSpPr>
+          <p:cNvPr id="23" name="Text 21"/>
+          <p:cNvSpPr/>
+          <p:nvPr/>
+        </p:nvSpPr>
+        <p:spPr>
+          <a:xfrm>
+            <a:off x="1417320" y="3886200"/>
+            <a:ext cx="6995160" cy="658368"/>
           </a:xfrm>
           <a:prstGeom prst="rect">
             <a:avLst/>
@@ -8409,7 +8453,7 @@
               <a:buNone/>
             </a:pPr>
             <a:r>
-              <a:rPr lang="en-US" sz="1400" dirty="0">
+              <a:rPr lang="en-US" sz="1300" dirty="0">
                 <a:solidFill>
                   <a:srgbClr val="E8F0FE"/>
                 </a:solidFill>
@@ -8417,172 +8461,9 @@
                 <a:ea typeface="BIZ UDPGothic" pitchFamily="34" charset="-122"/>
                 <a:cs typeface="BIZ UDPGothic" pitchFamily="34" charset="-120"/>
               </a:rPr>
-              <a:t>急速飲酒・空腹・女性・若年者がリスク大</a:t>
-            </a:r>
-            <a:endParaRPr lang="en-US" sz="1400" dirty="0"/>
-          </a:p>
-          <a:p>
-            <a:pPr indent="0" marL="0">
-              <a:lnSpc>
-                <a:spcPct val="110000"/>
-              </a:lnSpc>
-              <a:buNone/>
-            </a:pPr>
-            <a:r>
-              <a:rPr lang="en-US" sz="1400" dirty="0">
-                <a:solidFill>
-                  <a:srgbClr val="E8F0FE"/>
-                </a:solidFill>
-                <a:latin typeface="BIZ UDPGothic" pitchFamily="34" charset="0"/>
-                <a:ea typeface="BIZ UDPGothic" pitchFamily="34" charset="-122"/>
-                <a:cs typeface="BIZ UDPGothic" pitchFamily="34" charset="-120"/>
-              </a:rPr>
-              <a:t>「酒が強い人」でも油断は禁物</a:t>
-            </a:r>
-            <a:endParaRPr lang="en-US" sz="1400" dirty="0"/>
-          </a:p>
-        </p:txBody>
-      </p:sp>
-      <p:sp>
-        <p:nvSpPr>
-          <p:cNvPr id="20" name="Shape 18"/>
-          <p:cNvSpPr/>
-          <p:nvPr/>
-        </p:nvSpPr>
-        <p:spPr>
-          <a:xfrm>
-            <a:off x="731520" y="4151376"/>
-            <a:ext cx="7680960" cy="685800"/>
-          </a:xfrm>
-          <a:prstGeom prst="roundRect">
-            <a:avLst>
-              <a:gd name="adj" fmla="val 13333"/>
-            </a:avLst>
-          </a:prstGeom>
-          <a:solidFill>
-            <a:srgbClr val="243B5C"/>
-          </a:solidFill>
-          <a:ln/>
-        </p:spPr>
-      </p:sp>
-      <p:sp>
-        <p:nvSpPr>
-          <p:cNvPr id="21" name="Shape 19"/>
-          <p:cNvSpPr/>
-          <p:nvPr/>
-        </p:nvSpPr>
-        <p:spPr>
-          <a:xfrm>
-            <a:off x="914400" y="4242816"/>
-            <a:ext cx="502920" cy="502920"/>
-          </a:xfrm>
-          <a:prstGeom prst="ellipse">
-            <a:avLst/>
-          </a:prstGeom>
-          <a:solidFill>
-            <a:srgbClr val="4A90D9"/>
-          </a:solidFill>
-          <a:ln/>
-        </p:spPr>
-      </p:sp>
-      <p:sp>
-        <p:nvSpPr>
-          <p:cNvPr id="22" name="Text 20"/>
-          <p:cNvSpPr/>
-          <p:nvPr/>
-        </p:nvSpPr>
-        <p:spPr>
-          <a:xfrm>
-            <a:off x="914400" y="4242816"/>
-            <a:ext cx="502920" cy="502920"/>
-          </a:xfrm>
-          <a:prstGeom prst="rect">
-            <a:avLst/>
-          </a:prstGeom>
-          <a:noFill/>
-          <a:ln/>
-        </p:spPr>
-        <p:txBody>
-          <a:bodyPr wrap="square" lIns="0" tIns="0" rIns="0" bIns="0" rtlCol="0" anchor="ctr"/>
-          <a:lstStyle/>
-          <a:p>
-            <a:pPr algn="ctr" indent="0" marL="0">
-              <a:buNone/>
-            </a:pPr>
-            <a:r>
-              <a:rPr lang="en-US" sz="2000" b="1" dirty="0">
-                <a:solidFill>
-                  <a:srgbClr val="FFFFFF"/>
-                </a:solidFill>
-                <a:latin typeface="Segoe UI" pitchFamily="34" charset="0"/>
-                <a:ea typeface="Segoe UI" pitchFamily="34" charset="-122"/>
-                <a:cs typeface="Segoe UI" pitchFamily="34" charset="-120"/>
-              </a:rPr>
-              <a:t>5</a:t>
-            </a:r>
-            <a:endParaRPr lang="en-US" sz="2000" dirty="0"/>
-          </a:p>
-        </p:txBody>
-      </p:sp>
-      <p:sp>
-        <p:nvSpPr>
-          <p:cNvPr id="23" name="Text 21"/>
-          <p:cNvSpPr/>
-          <p:nvPr/>
-        </p:nvSpPr>
-        <p:spPr>
-          <a:xfrm>
-            <a:off x="1600200" y="4151376"/>
-            <a:ext cx="6583680" cy="685800"/>
-          </a:xfrm>
-          <a:prstGeom prst="rect">
-            <a:avLst/>
-          </a:prstGeom>
-          <a:noFill/>
-          <a:ln/>
-        </p:spPr>
-        <p:txBody>
-          <a:bodyPr wrap="square" lIns="0" tIns="0" rIns="0" bIns="0" rtlCol="0" anchor="ctr"/>
-          <a:lstStyle/>
-          <a:p>
-            <a:pPr indent="0" marL="0">
-              <a:lnSpc>
-                <a:spcPct val="110000"/>
-              </a:lnSpc>
-              <a:buNone/>
-            </a:pPr>
-            <a:r>
-              <a:rPr lang="en-US" sz="1400" dirty="0">
-                <a:solidFill>
-                  <a:srgbClr val="E8F0FE"/>
-                </a:solidFill>
-                <a:latin typeface="BIZ UDPGothic" pitchFamily="34" charset="0"/>
-                <a:ea typeface="BIZ UDPGothic" pitchFamily="34" charset="-122"/>
-                <a:cs typeface="BIZ UDPGothic" pitchFamily="34" charset="-120"/>
-              </a:rPr>
-              <a:t>繰り返す多量飲酒 → ウェルニッケ・コルサコフ症候群や</a:t>
-            </a:r>
-            <a:endParaRPr lang="en-US" sz="1400" dirty="0"/>
-          </a:p>
-          <a:p>
-            <a:pPr indent="0" marL="0">
-              <a:lnSpc>
-                <a:spcPct val="110000"/>
-              </a:lnSpc>
-              <a:buNone/>
-            </a:pPr>
-            <a:r>
-              <a:rPr lang="en-US" sz="1400" dirty="0">
-                <a:solidFill>
-                  <a:srgbClr val="E8F0FE"/>
-                </a:solidFill>
-                <a:latin typeface="BIZ UDPGothic" pitchFamily="34" charset="0"/>
-                <a:ea typeface="BIZ UDPGothic" pitchFamily="34" charset="-122"/>
-                <a:cs typeface="BIZ UDPGothic" pitchFamily="34" charset="-120"/>
-              </a:rPr>
-              <a:t>アルコール性認知症につながる</a:t>
-            </a:r>
-            <a:endParaRPr lang="en-US" sz="1400" dirty="0"/>
+              <a:t>繰り返す多量飲酒 → ウェルニッケ・コルサコフ症候群やアルコール性認知症</a:t>
+            </a:r>
+            <a:endParaRPr lang="en-US" sz="1300" dirty="0"/>
           </a:p>
         </p:txBody>
       </p:sp>
@@ -8594,7 +8475,7 @@
         </p:nvSpPr>
         <p:spPr>
           <a:xfrm>
-            <a:off x="1828800" y="4892040"/>
+            <a:off x="1828800" y="4709160"/>
             <a:ext cx="5486400" cy="0"/>
           </a:xfrm>
           <a:prstGeom prst="line">
@@ -8617,7 +8498,7 @@
         </p:nvSpPr>
         <p:spPr>
           <a:xfrm>
-            <a:off x="457200" y="4983480"/>
+            <a:off x="457200" y="4754880"/>
             <a:ext cx="8229600" cy="320040"/>
           </a:xfrm>
           <a:prstGeom prst="rect">
@@ -8634,7 +8515,7 @@
               <a:buNone/>
             </a:pPr>
             <a:r>
-              <a:rPr lang="en-US" sz="1300" dirty="0">
+              <a:rPr lang="en-US" sz="1200" dirty="0">
                 <a:solidFill>
                   <a:srgbClr val="636E72"/>
                 </a:solidFill>
@@ -8644,7 +8525,7 @@
               </a:rPr>
               <a:t>医知創造ラボ  今村久司  ｜  チャンネル登録よろしくお願いします</a:t>
             </a:r>
-            <a:endParaRPr lang="en-US" sz="1300" dirty="0"/>
+            <a:endParaRPr lang="en-US" sz="1200" dirty="0"/>
           </a:p>
         </p:txBody>
       </p:sp>
